--- a/CoworkPlaybook/CoworkPlaybook_Generic_zh-TW.pptx
+++ b/CoworkPlaybook/CoworkPlaybook_Generic_zh-TW.pptx
@@ -3190,7 +3190,7 @@
       </p:sp>
       <p:pic>
         <p:nvPicPr>
-          <p:cNvPr id="6" name="Image 0" descr="C:\temp\CoworkLab\v2\_working\screenshots\s1_01_input.png">    </p:cNvPr>
+          <p:cNvPr id="6" name="Image 0" descr="C:\temp\CoworkLab\v3\_working\screenshots\s1_01_input.png">    </p:cNvPr>
           <p:cNvPicPr>
             <a:picLocks noChangeAspect="1"/>
           </p:cNvPicPr>
@@ -3285,7 +3285,7 @@
       </p:sp>
       <p:pic>
         <p:nvPicPr>
-          <p:cNvPr id="9" name="Image 1" descr="C:\temp\CoworkLab\v2\_working\screenshots\s1_02_brief_done.png">    </p:cNvPr>
+          <p:cNvPr id="9" name="Image 1" descr="C:\temp\CoworkLab\v3\_working\screenshots\s1_04_schedule_done.png">    </p:cNvPr>
           <p:cNvPicPr>
             <a:picLocks noChangeAspect="1"/>
           </p:cNvPicPr>
@@ -4222,7 +4222,7 @@
         <p:spPr>
           <a:xfrm>
             <a:off x="4526280" y="566928"/>
-            <a:ext cx="7132320" cy="548640"/>
+            <a:ext cx="7132320" cy="822960"/>
           </a:xfrm>
           <a:prstGeom prst="rect">
             <a:avLst/>
@@ -4263,7 +4263,7 @@
         </p:nvSpPr>
         <p:spPr>
           <a:xfrm>
-            <a:off x="4526280" y="1243584"/>
+            <a:off x="4526280" y="1517904"/>
             <a:ext cx="7132320" cy="365760"/>
           </a:xfrm>
           <a:prstGeom prst="rect">
@@ -4302,7 +4302,7 @@
         </p:nvSpPr>
         <p:spPr>
           <a:xfrm>
-            <a:off x="4526280" y="1746504"/>
+            <a:off x="4526280" y="1975104"/>
             <a:ext cx="457200" cy="457200"/>
           </a:xfrm>
           <a:prstGeom prst="ellipse">
@@ -4329,7 +4329,7 @@
         </p:nvSpPr>
         <p:spPr>
           <a:xfrm>
-            <a:off x="4526280" y="1746504"/>
+            <a:off x="4526280" y="1975104"/>
             <a:ext cx="457200" cy="457200"/>
           </a:xfrm>
           <a:prstGeom prst="rect">
@@ -4368,7 +4368,7 @@
         </p:nvSpPr>
         <p:spPr>
           <a:xfrm>
-            <a:off x="5166360" y="1728216"/>
+            <a:off x="5166360" y="1956816"/>
             <a:ext cx="6492240" cy="365760"/>
           </a:xfrm>
           <a:prstGeom prst="rect">
@@ -4407,7 +4407,7 @@
         </p:nvSpPr>
         <p:spPr>
           <a:xfrm>
-            <a:off x="5166360" y="2093976"/>
+            <a:off x="5166360" y="2322576"/>
             <a:ext cx="6492240" cy="502920"/>
           </a:xfrm>
           <a:prstGeom prst="rect">
@@ -4449,7 +4449,7 @@
         </p:nvSpPr>
         <p:spPr>
           <a:xfrm>
-            <a:off x="4526280" y="2715768"/>
+            <a:off x="4526280" y="2944368"/>
             <a:ext cx="457200" cy="457200"/>
           </a:xfrm>
           <a:prstGeom prst="ellipse">
@@ -4476,7 +4476,7 @@
         </p:nvSpPr>
         <p:spPr>
           <a:xfrm>
-            <a:off x="4526280" y="2715768"/>
+            <a:off x="4526280" y="2944368"/>
             <a:ext cx="457200" cy="457200"/>
           </a:xfrm>
           <a:prstGeom prst="rect">
@@ -4515,7 +4515,7 @@
         </p:nvSpPr>
         <p:spPr>
           <a:xfrm>
-            <a:off x="5166360" y="2697480"/>
+            <a:off x="5166360" y="2926080"/>
             <a:ext cx="6492240" cy="365760"/>
           </a:xfrm>
           <a:prstGeom prst="rect">
@@ -4554,7 +4554,7 @@
         </p:nvSpPr>
         <p:spPr>
           <a:xfrm>
-            <a:off x="5166360" y="3063240"/>
+            <a:off x="5166360" y="3291840"/>
             <a:ext cx="6492240" cy="502920"/>
           </a:xfrm>
           <a:prstGeom prst="rect">
@@ -4596,7 +4596,7 @@
         </p:nvSpPr>
         <p:spPr>
           <a:xfrm>
-            <a:off x="4526280" y="3685032"/>
+            <a:off x="4526280" y="3913632"/>
             <a:ext cx="457200" cy="457200"/>
           </a:xfrm>
           <a:prstGeom prst="ellipse">
@@ -4623,7 +4623,7 @@
         </p:nvSpPr>
         <p:spPr>
           <a:xfrm>
-            <a:off x="4526280" y="3685032"/>
+            <a:off x="4526280" y="3913632"/>
             <a:ext cx="457200" cy="457200"/>
           </a:xfrm>
           <a:prstGeom prst="rect">
@@ -4662,7 +4662,7 @@
         </p:nvSpPr>
         <p:spPr>
           <a:xfrm>
-            <a:off x="5166360" y="3666744"/>
+            <a:off x="5166360" y="3895344"/>
             <a:ext cx="6492240" cy="365760"/>
           </a:xfrm>
           <a:prstGeom prst="rect">
@@ -4701,7 +4701,7 @@
         </p:nvSpPr>
         <p:spPr>
           <a:xfrm>
-            <a:off x="5166360" y="4032504"/>
+            <a:off x="5166360" y="4261104"/>
             <a:ext cx="6492240" cy="502920"/>
           </a:xfrm>
           <a:prstGeom prst="rect">
@@ -4743,7 +4743,7 @@
         </p:nvSpPr>
         <p:spPr>
           <a:xfrm>
-            <a:off x="4526280" y="4654296"/>
+            <a:off x="4526280" y="4882896"/>
             <a:ext cx="457200" cy="457200"/>
           </a:xfrm>
           <a:prstGeom prst="ellipse">
@@ -4770,7 +4770,7 @@
         </p:nvSpPr>
         <p:spPr>
           <a:xfrm>
-            <a:off x="4526280" y="4654296"/>
+            <a:off x="4526280" y="4882896"/>
             <a:ext cx="457200" cy="457200"/>
           </a:xfrm>
           <a:prstGeom prst="rect">
@@ -4809,7 +4809,7 @@
         </p:nvSpPr>
         <p:spPr>
           <a:xfrm>
-            <a:off x="5166360" y="4636008"/>
+            <a:off x="5166360" y="4864608"/>
             <a:ext cx="6492240" cy="365760"/>
           </a:xfrm>
           <a:prstGeom prst="rect">
@@ -4848,7 +4848,7 @@
         </p:nvSpPr>
         <p:spPr>
           <a:xfrm>
-            <a:off x="5166360" y="5001768"/>
+            <a:off x="5166360" y="5230368"/>
             <a:ext cx="6492240" cy="502920"/>
           </a:xfrm>
           <a:prstGeom prst="rect">
@@ -5124,7 +5124,7 @@
       </p:sp>
       <p:pic>
         <p:nvPicPr>
-          <p:cNvPr id="6" name="Image 0" descr="C:\temp\CoworkLab\v2\_working\screenshots\s2_01_input.png">    </p:cNvPr>
+          <p:cNvPr id="6" name="Image 0" descr="C:\temp\CoworkLab\v3\_working\screenshots\s2_01_input.png">    </p:cNvPr>
           <p:cNvPicPr>
             <a:picLocks noChangeAspect="1"/>
           </p:cNvPicPr>
@@ -5219,7 +5219,7 @@
       </p:sp>
       <p:pic>
         <p:nvPicPr>
-          <p:cNvPr id="9" name="Image 1" descr="C:\temp\CoworkLab\v2\_working\screenshots\s2_02_brief_done.png">    </p:cNvPr>
+          <p:cNvPr id="9" name="Image 1" descr="C:\temp\CoworkLab\v3\_working\screenshots\s2_07_meeting_done.png">    </p:cNvPr>
           <p:cNvPicPr>
             <a:picLocks noChangeAspect="1"/>
           </p:cNvPicPr>
@@ -6175,7 +6175,7 @@
         </p:nvSpPr>
         <p:spPr>
           <a:xfrm>
-            <a:off x="4526280" y="2020824"/>
+            <a:off x="4526280" y="1975104"/>
             <a:ext cx="457200" cy="457200"/>
           </a:xfrm>
           <a:prstGeom prst="ellipse">
@@ -6202,7 +6202,7 @@
         </p:nvSpPr>
         <p:spPr>
           <a:xfrm>
-            <a:off x="4526280" y="2020824"/>
+            <a:off x="4526280" y="1975104"/>
             <a:ext cx="457200" cy="457200"/>
           </a:xfrm>
           <a:prstGeom prst="rect">
@@ -6241,7 +6241,7 @@
         </p:nvSpPr>
         <p:spPr>
           <a:xfrm>
-            <a:off x="5166360" y="2002536"/>
+            <a:off x="5166360" y="1956816"/>
             <a:ext cx="6492240" cy="365760"/>
           </a:xfrm>
           <a:prstGeom prst="rect">
@@ -6280,7 +6280,7 @@
         </p:nvSpPr>
         <p:spPr>
           <a:xfrm>
-            <a:off x="5166360" y="2368296"/>
+            <a:off x="5166360" y="2322576"/>
             <a:ext cx="6492240" cy="502920"/>
           </a:xfrm>
           <a:prstGeom prst="rect">
@@ -6322,7 +6322,7 @@
         </p:nvSpPr>
         <p:spPr>
           <a:xfrm>
-            <a:off x="4526280" y="2990088"/>
+            <a:off x="4526280" y="2944368"/>
             <a:ext cx="457200" cy="457200"/>
           </a:xfrm>
           <a:prstGeom prst="ellipse">
@@ -6349,7 +6349,7 @@
         </p:nvSpPr>
         <p:spPr>
           <a:xfrm>
-            <a:off x="4526280" y="2990088"/>
+            <a:off x="4526280" y="2944368"/>
             <a:ext cx="457200" cy="457200"/>
           </a:xfrm>
           <a:prstGeom prst="rect">
@@ -6388,7 +6388,7 @@
         </p:nvSpPr>
         <p:spPr>
           <a:xfrm>
-            <a:off x="5166360" y="2971800"/>
+            <a:off x="5166360" y="2926080"/>
             <a:ext cx="6492240" cy="365760"/>
           </a:xfrm>
           <a:prstGeom prst="rect">
@@ -6427,7 +6427,7 @@
         </p:nvSpPr>
         <p:spPr>
           <a:xfrm>
-            <a:off x="5166360" y="3337560"/>
+            <a:off x="5166360" y="3291840"/>
             <a:ext cx="6492240" cy="502920"/>
           </a:xfrm>
           <a:prstGeom prst="rect">
@@ -6469,7 +6469,7 @@
         </p:nvSpPr>
         <p:spPr>
           <a:xfrm>
-            <a:off x="4526280" y="3959352"/>
+            <a:off x="4526280" y="3913632"/>
             <a:ext cx="457200" cy="457200"/>
           </a:xfrm>
           <a:prstGeom prst="ellipse">
@@ -6496,7 +6496,7 @@
         </p:nvSpPr>
         <p:spPr>
           <a:xfrm>
-            <a:off x="4526280" y="3959352"/>
+            <a:off x="4526280" y="3913632"/>
             <a:ext cx="457200" cy="457200"/>
           </a:xfrm>
           <a:prstGeom prst="rect">
@@ -6535,7 +6535,7 @@
         </p:nvSpPr>
         <p:spPr>
           <a:xfrm>
-            <a:off x="5166360" y="3941064"/>
+            <a:off x="5166360" y="3895344"/>
             <a:ext cx="6492240" cy="365760"/>
           </a:xfrm>
           <a:prstGeom prst="rect">
@@ -6574,7 +6574,7 @@
         </p:nvSpPr>
         <p:spPr>
           <a:xfrm>
-            <a:off x="5166360" y="4306824"/>
+            <a:off x="5166360" y="4261104"/>
             <a:ext cx="6492240" cy="502920"/>
           </a:xfrm>
           <a:prstGeom prst="rect">
@@ -6616,7 +6616,7 @@
         </p:nvSpPr>
         <p:spPr>
           <a:xfrm>
-            <a:off x="4526280" y="4928616"/>
+            <a:off x="4526280" y="4882896"/>
             <a:ext cx="457200" cy="457200"/>
           </a:xfrm>
           <a:prstGeom prst="ellipse">
@@ -6643,7 +6643,7 @@
         </p:nvSpPr>
         <p:spPr>
           <a:xfrm>
-            <a:off x="4526280" y="4928616"/>
+            <a:off x="4526280" y="4882896"/>
             <a:ext cx="457200" cy="457200"/>
           </a:xfrm>
           <a:prstGeom prst="rect">
@@ -6682,7 +6682,7 @@
         </p:nvSpPr>
         <p:spPr>
           <a:xfrm>
-            <a:off x="5166360" y="4910328"/>
+            <a:off x="5166360" y="4864608"/>
             <a:ext cx="6492240" cy="365760"/>
           </a:xfrm>
           <a:prstGeom prst="rect">
@@ -6721,7 +6721,7 @@
         </p:nvSpPr>
         <p:spPr>
           <a:xfrm>
-            <a:off x="5166360" y="5276088"/>
+            <a:off x="5166360" y="5230368"/>
             <a:ext cx="6492240" cy="502920"/>
           </a:xfrm>
           <a:prstGeom prst="rect">
@@ -6997,7 +6997,7 @@
       </p:sp>
       <p:pic>
         <p:nvPicPr>
-          <p:cNvPr id="6" name="Image 0" descr="C:\temp\CoworkLab\v2\_working\screenshots\s3_01_input.png">    </p:cNvPr>
+          <p:cNvPr id="6" name="Image 0" descr="C:\temp\CoworkLab\v3\_working\screenshots\s3_01_input.png">    </p:cNvPr>
           <p:cNvPicPr>
             <a:picLocks noChangeAspect="1"/>
           </p:cNvPicPr>
@@ -7092,7 +7092,7 @@
       </p:sp>
       <p:pic>
         <p:nvPicPr>
-          <p:cNvPr id="9" name="Image 1" descr="C:\temp\CoworkLab\v2\_working\screenshots\s3_02_dashboard_done.png">    </p:cNvPr>
+          <p:cNvPr id="9" name="Image 1" descr="C:\temp\CoworkLab\v3\_working\screenshots\s3_05_cards.png">    </p:cNvPr>
           <p:cNvPicPr>
             <a:picLocks noChangeAspect="1"/>
           </p:cNvPicPr>
@@ -8048,7 +8048,7 @@
         </p:nvSpPr>
         <p:spPr>
           <a:xfrm>
-            <a:off x="4526280" y="2020824"/>
+            <a:off x="4526280" y="1975104"/>
             <a:ext cx="457200" cy="457200"/>
           </a:xfrm>
           <a:prstGeom prst="ellipse">
@@ -8075,7 +8075,7 @@
         </p:nvSpPr>
         <p:spPr>
           <a:xfrm>
-            <a:off x="4526280" y="2020824"/>
+            <a:off x="4526280" y="1975104"/>
             <a:ext cx="457200" cy="457200"/>
           </a:xfrm>
           <a:prstGeom prst="rect">
@@ -8114,7 +8114,7 @@
         </p:nvSpPr>
         <p:spPr>
           <a:xfrm>
-            <a:off x="5166360" y="2002536"/>
+            <a:off x="5166360" y="1956816"/>
             <a:ext cx="6492240" cy="365760"/>
           </a:xfrm>
           <a:prstGeom prst="rect">
@@ -8153,7 +8153,7 @@
         </p:nvSpPr>
         <p:spPr>
           <a:xfrm>
-            <a:off x="5166360" y="2368296"/>
+            <a:off x="5166360" y="2322576"/>
             <a:ext cx="6492240" cy="502920"/>
           </a:xfrm>
           <a:prstGeom prst="rect">
@@ -8195,7 +8195,7 @@
         </p:nvSpPr>
         <p:spPr>
           <a:xfrm>
-            <a:off x="4526280" y="2990088"/>
+            <a:off x="4526280" y="2944368"/>
             <a:ext cx="457200" cy="457200"/>
           </a:xfrm>
           <a:prstGeom prst="ellipse">
@@ -8222,7 +8222,7 @@
         </p:nvSpPr>
         <p:spPr>
           <a:xfrm>
-            <a:off x="4526280" y="2990088"/>
+            <a:off x="4526280" y="2944368"/>
             <a:ext cx="457200" cy="457200"/>
           </a:xfrm>
           <a:prstGeom prst="rect">
@@ -8261,7 +8261,7 @@
         </p:nvSpPr>
         <p:spPr>
           <a:xfrm>
-            <a:off x="5166360" y="2971800"/>
+            <a:off x="5166360" y="2926080"/>
             <a:ext cx="6492240" cy="365760"/>
           </a:xfrm>
           <a:prstGeom prst="rect">
@@ -8300,7 +8300,7 @@
         </p:nvSpPr>
         <p:spPr>
           <a:xfrm>
-            <a:off x="5166360" y="3337560"/>
+            <a:off x="5166360" y="3291840"/>
             <a:ext cx="6492240" cy="502920"/>
           </a:xfrm>
           <a:prstGeom prst="rect">
@@ -8342,7 +8342,7 @@
         </p:nvSpPr>
         <p:spPr>
           <a:xfrm>
-            <a:off x="4526280" y="3959352"/>
+            <a:off x="4526280" y="3913632"/>
             <a:ext cx="457200" cy="457200"/>
           </a:xfrm>
           <a:prstGeom prst="ellipse">
@@ -8369,7 +8369,7 @@
         </p:nvSpPr>
         <p:spPr>
           <a:xfrm>
-            <a:off x="4526280" y="3959352"/>
+            <a:off x="4526280" y="3913632"/>
             <a:ext cx="457200" cy="457200"/>
           </a:xfrm>
           <a:prstGeom prst="rect">
@@ -8408,7 +8408,7 @@
         </p:nvSpPr>
         <p:spPr>
           <a:xfrm>
-            <a:off x="5166360" y="3941064"/>
+            <a:off x="5166360" y="3895344"/>
             <a:ext cx="6492240" cy="365760"/>
           </a:xfrm>
           <a:prstGeom prst="rect">
@@ -8447,7 +8447,7 @@
         </p:nvSpPr>
         <p:spPr>
           <a:xfrm>
-            <a:off x="5166360" y="4306824"/>
+            <a:off x="5166360" y="4261104"/>
             <a:ext cx="6492240" cy="502920"/>
           </a:xfrm>
           <a:prstGeom prst="rect">
@@ -8489,7 +8489,7 @@
         </p:nvSpPr>
         <p:spPr>
           <a:xfrm>
-            <a:off x="4526280" y="4928616"/>
+            <a:off x="4526280" y="4882896"/>
             <a:ext cx="457200" cy="457200"/>
           </a:xfrm>
           <a:prstGeom prst="ellipse">
@@ -8516,7 +8516,7 @@
         </p:nvSpPr>
         <p:spPr>
           <a:xfrm>
-            <a:off x="4526280" y="4928616"/>
+            <a:off x="4526280" y="4882896"/>
             <a:ext cx="457200" cy="457200"/>
           </a:xfrm>
           <a:prstGeom prst="rect">
@@ -8555,7 +8555,7 @@
         </p:nvSpPr>
         <p:spPr>
           <a:xfrm>
-            <a:off x="5166360" y="4910328"/>
+            <a:off x="5166360" y="4864608"/>
             <a:ext cx="6492240" cy="365760"/>
           </a:xfrm>
           <a:prstGeom prst="rect">
@@ -8594,7 +8594,7 @@
         </p:nvSpPr>
         <p:spPr>
           <a:xfrm>
-            <a:off x="5166360" y="5276088"/>
+            <a:off x="5166360" y="5230368"/>
             <a:ext cx="6492240" cy="502920"/>
           </a:xfrm>
           <a:prstGeom prst="rect">
@@ -8870,7 +8870,7 @@
       </p:sp>
       <p:pic>
         <p:nvPicPr>
-          <p:cNvPr id="6" name="Image 0" descr="C:\temp\CoworkLab\v2\_working\screenshots\s4_01_input.png">    </p:cNvPr>
+          <p:cNvPr id="6" name="Image 0" descr="C:\temp\CoworkLab\v3\_working\screenshots\s4_01_input.png">    </p:cNvPr>
           <p:cNvPicPr>
             <a:picLocks noChangeAspect="1"/>
           </p:cNvPicPr>
@@ -8965,7 +8965,7 @@
       </p:sp>
       <p:pic>
         <p:nvPicPr>
-          <p:cNvPr id="9" name="Image 1" descr="C:\temp\CoworkLab\v2\_working\screenshots\s4_03_deck_done.png">    </p:cNvPr>
+          <p:cNvPr id="9" name="Image 1" descr="C:\temp\CoworkLab\v3\_working\screenshots\s4_05_deck_done.png">    </p:cNvPr>
           <p:cNvPicPr>
             <a:picLocks noChangeAspect="1"/>
           </p:cNvPicPr>
@@ -9841,7 +9841,7 @@
         <p:spPr>
           <a:xfrm>
             <a:off x="4526280" y="566928"/>
-            <a:ext cx="7132320" cy="548640"/>
+            <a:ext cx="7132320" cy="822960"/>
           </a:xfrm>
           <a:prstGeom prst="rect">
             <a:avLst/>
@@ -9882,7 +9882,7 @@
         </p:nvSpPr>
         <p:spPr>
           <a:xfrm>
-            <a:off x="4526280" y="1243584"/>
+            <a:off x="4526280" y="1517904"/>
             <a:ext cx="7132320" cy="365760"/>
           </a:xfrm>
           <a:prstGeom prst="rect">
@@ -9921,7 +9921,7 @@
         </p:nvSpPr>
         <p:spPr>
           <a:xfrm>
-            <a:off x="4526280" y="1746504"/>
+            <a:off x="4526280" y="1975104"/>
             <a:ext cx="457200" cy="457200"/>
           </a:xfrm>
           <a:prstGeom prst="ellipse">
@@ -9948,7 +9948,7 @@
         </p:nvSpPr>
         <p:spPr>
           <a:xfrm>
-            <a:off x="4526280" y="1746504"/>
+            <a:off x="4526280" y="1975104"/>
             <a:ext cx="457200" cy="457200"/>
           </a:xfrm>
           <a:prstGeom prst="rect">
@@ -9987,7 +9987,7 @@
         </p:nvSpPr>
         <p:spPr>
           <a:xfrm>
-            <a:off x="5166360" y="1728216"/>
+            <a:off x="5166360" y="1956816"/>
             <a:ext cx="6492240" cy="365760"/>
           </a:xfrm>
           <a:prstGeom prst="rect">
@@ -10026,7 +10026,7 @@
         </p:nvSpPr>
         <p:spPr>
           <a:xfrm>
-            <a:off x="5166360" y="2093976"/>
+            <a:off x="5166360" y="2322576"/>
             <a:ext cx="6492240" cy="502920"/>
           </a:xfrm>
           <a:prstGeom prst="rect">
@@ -10068,7 +10068,7 @@
         </p:nvSpPr>
         <p:spPr>
           <a:xfrm>
-            <a:off x="4526280" y="2715768"/>
+            <a:off x="4526280" y="2944368"/>
             <a:ext cx="457200" cy="457200"/>
           </a:xfrm>
           <a:prstGeom prst="ellipse">
@@ -10095,7 +10095,7 @@
         </p:nvSpPr>
         <p:spPr>
           <a:xfrm>
-            <a:off x="4526280" y="2715768"/>
+            <a:off x="4526280" y="2944368"/>
             <a:ext cx="457200" cy="457200"/>
           </a:xfrm>
           <a:prstGeom prst="rect">
@@ -10134,7 +10134,7 @@
         </p:nvSpPr>
         <p:spPr>
           <a:xfrm>
-            <a:off x="5166360" y="2697480"/>
+            <a:off x="5166360" y="2926080"/>
             <a:ext cx="6492240" cy="365760"/>
           </a:xfrm>
           <a:prstGeom prst="rect">
@@ -10173,7 +10173,7 @@
         </p:nvSpPr>
         <p:spPr>
           <a:xfrm>
-            <a:off x="5166360" y="3063240"/>
+            <a:off x="5166360" y="3291840"/>
             <a:ext cx="6492240" cy="502920"/>
           </a:xfrm>
           <a:prstGeom prst="rect">
@@ -10215,7 +10215,7 @@
         </p:nvSpPr>
         <p:spPr>
           <a:xfrm>
-            <a:off x="4526280" y="3685032"/>
+            <a:off x="4526280" y="3913632"/>
             <a:ext cx="457200" cy="457200"/>
           </a:xfrm>
           <a:prstGeom prst="ellipse">
@@ -10242,7 +10242,7 @@
         </p:nvSpPr>
         <p:spPr>
           <a:xfrm>
-            <a:off x="4526280" y="3685032"/>
+            <a:off x="4526280" y="3913632"/>
             <a:ext cx="457200" cy="457200"/>
           </a:xfrm>
           <a:prstGeom prst="rect">
@@ -10281,7 +10281,7 @@
         </p:nvSpPr>
         <p:spPr>
           <a:xfrm>
-            <a:off x="5166360" y="3666744"/>
+            <a:off x="5166360" y="3895344"/>
             <a:ext cx="6492240" cy="365760"/>
           </a:xfrm>
           <a:prstGeom prst="rect">
@@ -10320,7 +10320,7 @@
         </p:nvSpPr>
         <p:spPr>
           <a:xfrm>
-            <a:off x="5166360" y="4032504"/>
+            <a:off x="5166360" y="4261104"/>
             <a:ext cx="6492240" cy="502920"/>
           </a:xfrm>
           <a:prstGeom prst="rect">
@@ -10362,7 +10362,7 @@
         </p:nvSpPr>
         <p:spPr>
           <a:xfrm>
-            <a:off x="4526280" y="4654296"/>
+            <a:off x="4526280" y="4882896"/>
             <a:ext cx="457200" cy="457200"/>
           </a:xfrm>
           <a:prstGeom prst="ellipse">
@@ -10389,7 +10389,7 @@
         </p:nvSpPr>
         <p:spPr>
           <a:xfrm>
-            <a:off x="4526280" y="4654296"/>
+            <a:off x="4526280" y="4882896"/>
             <a:ext cx="457200" cy="457200"/>
           </a:xfrm>
           <a:prstGeom prst="rect">
@@ -10428,7 +10428,7 @@
         </p:nvSpPr>
         <p:spPr>
           <a:xfrm>
-            <a:off x="5166360" y="4636008"/>
+            <a:off x="5166360" y="4864608"/>
             <a:ext cx="6492240" cy="365760"/>
           </a:xfrm>
           <a:prstGeom prst="rect">
@@ -10467,7 +10467,7 @@
         </p:nvSpPr>
         <p:spPr>
           <a:xfrm>
-            <a:off x="5166360" y="5001768"/>
+            <a:off x="5166360" y="5230368"/>
             <a:ext cx="6492240" cy="502920"/>
           </a:xfrm>
           <a:prstGeom prst="rect">
@@ -10743,7 +10743,7 @@
       </p:sp>
       <p:pic>
         <p:nvPicPr>
-          <p:cNvPr id="6" name="Image 0" descr="C:\temp\CoworkLab\v2\_working\screenshots\s5_01_howto.png">    </p:cNvPr>
+          <p:cNvPr id="6" name="Image 0" descr="C:\temp\CoworkLab\v3\_working\screenshots\s5_01_howto_input.png">    </p:cNvPr>
           <p:cNvPicPr>
             <a:picLocks noChangeAspect="1"/>
           </p:cNvPicPr>
@@ -10838,7 +10838,7 @@
       </p:sp>
       <p:pic>
         <p:nvPicPr>
-          <p:cNvPr id="9" name="Image 1" descr="C:\temp\CoworkLab\v2\_working\screenshots\s5_03_report_done.png">    </p:cNvPr>
+          <p:cNvPr id="9" name="Image 1" descr="C:\temp\CoworkLab\v3\_working\screenshots\s5_10_trigger_done.png">    </p:cNvPr>
           <p:cNvPicPr>
             <a:picLocks noChangeAspect="1"/>
           </p:cNvPicPr>
@@ -21257,17 +21257,17 @@
         </p:nvSpPr>
         <p:spPr>
           <a:xfrm>
-            <a:off x="731520" y="3218688"/>
-            <a:ext cx="1706819" cy="274320"/>
-          </a:xfrm>
-          <a:prstGeom prst="rect">
-            <a:avLst/>
-          </a:prstGeom>
-          <a:noFill/>
-          <a:ln/>
-        </p:spPr>
-        <p:txBody>
-          <a:bodyPr wrap="square" rtlCol="0" anchor="ctr"/>
+            <a:off x="731520" y="3163824"/>
+            <a:ext cx="1706819" cy="189865"/>
+          </a:xfrm>
+          <a:prstGeom prst="rect">
+            <a:avLst/>
+          </a:prstGeom>
+          <a:noFill/>
+          <a:ln/>
+        </p:spPr>
+        <p:txBody>
+          <a:bodyPr wrap="square" rtlCol="0" anchor="t"/>
           <a:lstStyle/>
           <a:p>
             <a:pPr algn="ctr" indent="0" marL="0">
@@ -21296,17 +21296,17 @@
         </p:nvSpPr>
         <p:spPr>
           <a:xfrm>
-            <a:off x="731520" y="3493008"/>
-            <a:ext cx="1706819" cy="548640"/>
-          </a:xfrm>
-          <a:prstGeom prst="rect">
-            <a:avLst/>
-          </a:prstGeom>
-          <a:noFill/>
-          <a:ln/>
-        </p:spPr>
-        <p:txBody>
-          <a:bodyPr wrap="square" rtlCol="0" anchor="ctr"/>
+            <a:off x="731520" y="3408553"/>
+            <a:ext cx="1706819" cy="247650"/>
+          </a:xfrm>
+          <a:prstGeom prst="rect">
+            <a:avLst/>
+          </a:prstGeom>
+          <a:noFill/>
+          <a:ln/>
+        </p:spPr>
+        <p:txBody>
+          <a:bodyPr wrap="square" rtlCol="0" anchor="t"/>
           <a:lstStyle/>
           <a:p>
             <a:pPr algn="ctr" indent="0" marL="0">
@@ -21335,22 +21335,22 @@
         </p:nvSpPr>
         <p:spPr>
           <a:xfrm>
-            <a:off x="731520" y="4114800"/>
-            <a:ext cx="1706819" cy="457200"/>
-          </a:xfrm>
-          <a:prstGeom prst="rect">
-            <a:avLst/>
-          </a:prstGeom>
-          <a:noFill/>
-          <a:ln/>
-        </p:spPr>
-        <p:txBody>
-          <a:bodyPr wrap="square" rtlCol="0" anchor="ctr"/>
+            <a:off x="731520" y="3738499"/>
+            <a:ext cx="1706819" cy="594360"/>
+          </a:xfrm>
+          <a:prstGeom prst="rect">
+            <a:avLst/>
+          </a:prstGeom>
+          <a:noFill/>
+          <a:ln/>
+        </p:spPr>
+        <p:txBody>
+          <a:bodyPr wrap="square" rtlCol="0" anchor="t"/>
           <a:lstStyle/>
           <a:p>
             <a:pPr algn="ctr" indent="0" marL="0">
               <a:lnSpc>
-                <a:spcPct val="110000"/>
+                <a:spcPct val="105000"/>
               </a:lnSpc>
               <a:buNone/>
             </a:pPr>
@@ -21377,17 +21377,17 @@
         </p:nvSpPr>
         <p:spPr>
           <a:xfrm>
-            <a:off x="731520" y="4645152"/>
-            <a:ext cx="1706819" cy="457200"/>
-          </a:xfrm>
-          <a:prstGeom prst="rect">
-            <a:avLst/>
-          </a:prstGeom>
-          <a:noFill/>
-          <a:ln/>
-        </p:spPr>
-        <p:txBody>
-          <a:bodyPr wrap="square" rtlCol="0" anchor="ctr"/>
+            <a:off x="731520" y="4415155"/>
+            <a:ext cx="1706819" cy="363220"/>
+          </a:xfrm>
+          <a:prstGeom prst="rect">
+            <a:avLst/>
+          </a:prstGeom>
+          <a:noFill/>
+          <a:ln/>
+        </p:spPr>
+        <p:txBody>
+          <a:bodyPr wrap="square" rtlCol="0" anchor="t"/>
           <a:lstStyle/>
           <a:p>
             <a:pPr algn="ctr" indent="0" marL="0">
@@ -21529,17 +21529,17 @@
         </p:nvSpPr>
         <p:spPr>
           <a:xfrm>
-            <a:off x="2986979" y="3218688"/>
-            <a:ext cx="1706819" cy="274320"/>
-          </a:xfrm>
-          <a:prstGeom prst="rect">
-            <a:avLst/>
-          </a:prstGeom>
-          <a:noFill/>
-          <a:ln/>
-        </p:spPr>
-        <p:txBody>
-          <a:bodyPr wrap="square" rtlCol="0" anchor="ctr"/>
+            <a:off x="2986979" y="3163824"/>
+            <a:ext cx="1706819" cy="189865"/>
+          </a:xfrm>
+          <a:prstGeom prst="rect">
+            <a:avLst/>
+          </a:prstGeom>
+          <a:noFill/>
+          <a:ln/>
+        </p:spPr>
+        <p:txBody>
+          <a:bodyPr wrap="square" rtlCol="0" anchor="t"/>
           <a:lstStyle/>
           <a:p>
             <a:pPr algn="ctr" indent="0" marL="0">
@@ -21568,17 +21568,17 @@
         </p:nvSpPr>
         <p:spPr>
           <a:xfrm>
-            <a:off x="2986979" y="3493008"/>
-            <a:ext cx="1706819" cy="548640"/>
-          </a:xfrm>
-          <a:prstGeom prst="rect">
-            <a:avLst/>
-          </a:prstGeom>
-          <a:noFill/>
-          <a:ln/>
-        </p:spPr>
-        <p:txBody>
-          <a:bodyPr wrap="square" rtlCol="0" anchor="ctr"/>
+            <a:off x="2986979" y="3408553"/>
+            <a:ext cx="1706819" cy="247650"/>
+          </a:xfrm>
+          <a:prstGeom prst="rect">
+            <a:avLst/>
+          </a:prstGeom>
+          <a:noFill/>
+          <a:ln/>
+        </p:spPr>
+        <p:txBody>
+          <a:bodyPr wrap="square" rtlCol="0" anchor="t"/>
           <a:lstStyle/>
           <a:p>
             <a:pPr algn="ctr" indent="0" marL="0">
@@ -21607,22 +21607,22 @@
         </p:nvSpPr>
         <p:spPr>
           <a:xfrm>
-            <a:off x="2986979" y="4114800"/>
-            <a:ext cx="1706819" cy="457200"/>
-          </a:xfrm>
-          <a:prstGeom prst="rect">
-            <a:avLst/>
-          </a:prstGeom>
-          <a:noFill/>
-          <a:ln/>
-        </p:spPr>
-        <p:txBody>
-          <a:bodyPr wrap="square" rtlCol="0" anchor="ctr"/>
+            <a:off x="2986979" y="3738499"/>
+            <a:ext cx="1706819" cy="792480"/>
+          </a:xfrm>
+          <a:prstGeom prst="rect">
+            <a:avLst/>
+          </a:prstGeom>
+          <a:noFill/>
+          <a:ln/>
+        </p:spPr>
+        <p:txBody>
+          <a:bodyPr wrap="square" rtlCol="0" anchor="t"/>
           <a:lstStyle/>
           <a:p>
             <a:pPr algn="ctr" indent="0" marL="0">
               <a:lnSpc>
-                <a:spcPct val="110000"/>
+                <a:spcPct val="105000"/>
               </a:lnSpc>
               <a:buNone/>
             </a:pPr>
@@ -21649,17 +21649,17 @@
         </p:nvSpPr>
         <p:spPr>
           <a:xfrm>
-            <a:off x="2986979" y="4645152"/>
-            <a:ext cx="1706819" cy="457200"/>
-          </a:xfrm>
-          <a:prstGeom prst="rect">
-            <a:avLst/>
-          </a:prstGeom>
-          <a:noFill/>
-          <a:ln/>
-        </p:spPr>
-        <p:txBody>
-          <a:bodyPr wrap="square" rtlCol="0" anchor="ctr"/>
+            <a:off x="2986979" y="4613275"/>
+            <a:ext cx="1706819" cy="363220"/>
+          </a:xfrm>
+          <a:prstGeom prst="rect">
+            <a:avLst/>
+          </a:prstGeom>
+          <a:noFill/>
+          <a:ln/>
+        </p:spPr>
+        <p:txBody>
+          <a:bodyPr wrap="square" rtlCol="0" anchor="t"/>
           <a:lstStyle/>
           <a:p>
             <a:pPr algn="ctr" indent="0" marL="0">
@@ -21801,17 +21801,17 @@
         </p:nvSpPr>
         <p:spPr>
           <a:xfrm>
-            <a:off x="5242438" y="3218688"/>
-            <a:ext cx="1706819" cy="274320"/>
-          </a:xfrm>
-          <a:prstGeom prst="rect">
-            <a:avLst/>
-          </a:prstGeom>
-          <a:noFill/>
-          <a:ln/>
-        </p:spPr>
-        <p:txBody>
-          <a:bodyPr wrap="square" rtlCol="0" anchor="ctr"/>
+            <a:off x="5242438" y="3163824"/>
+            <a:ext cx="1706819" cy="189865"/>
+          </a:xfrm>
+          <a:prstGeom prst="rect">
+            <a:avLst/>
+          </a:prstGeom>
+          <a:noFill/>
+          <a:ln/>
+        </p:spPr>
+        <p:txBody>
+          <a:bodyPr wrap="square" rtlCol="0" anchor="t"/>
           <a:lstStyle/>
           <a:p>
             <a:pPr algn="ctr" indent="0" marL="0">
@@ -21840,17 +21840,17 @@
         </p:nvSpPr>
         <p:spPr>
           <a:xfrm>
-            <a:off x="5242438" y="3493008"/>
-            <a:ext cx="1706819" cy="548640"/>
-          </a:xfrm>
-          <a:prstGeom prst="rect">
-            <a:avLst/>
-          </a:prstGeom>
-          <a:noFill/>
-          <a:ln/>
-        </p:spPr>
-        <p:txBody>
-          <a:bodyPr wrap="square" rtlCol="0" anchor="ctr"/>
+            <a:off x="5242438" y="3408553"/>
+            <a:ext cx="1706819" cy="495300"/>
+          </a:xfrm>
+          <a:prstGeom prst="rect">
+            <a:avLst/>
+          </a:prstGeom>
+          <a:noFill/>
+          <a:ln/>
+        </p:spPr>
+        <p:txBody>
+          <a:bodyPr wrap="square" rtlCol="0" anchor="t"/>
           <a:lstStyle/>
           <a:p>
             <a:pPr algn="ctr" indent="0" marL="0">
@@ -21879,22 +21879,22 @@
         </p:nvSpPr>
         <p:spPr>
           <a:xfrm>
-            <a:off x="5242438" y="4114800"/>
-            <a:ext cx="1706819" cy="457200"/>
-          </a:xfrm>
-          <a:prstGeom prst="rect">
-            <a:avLst/>
-          </a:prstGeom>
-          <a:noFill/>
-          <a:ln/>
-        </p:spPr>
-        <p:txBody>
-          <a:bodyPr wrap="square" rtlCol="0" anchor="ctr"/>
+            <a:off x="5242438" y="3986149"/>
+            <a:ext cx="1706819" cy="396240"/>
+          </a:xfrm>
+          <a:prstGeom prst="rect">
+            <a:avLst/>
+          </a:prstGeom>
+          <a:noFill/>
+          <a:ln/>
+        </p:spPr>
+        <p:txBody>
+          <a:bodyPr wrap="square" rtlCol="0" anchor="t"/>
           <a:lstStyle/>
           <a:p>
             <a:pPr algn="ctr" indent="0" marL="0">
               <a:lnSpc>
-                <a:spcPct val="110000"/>
+                <a:spcPct val="105000"/>
               </a:lnSpc>
               <a:buNone/>
             </a:pPr>
@@ -21921,17 +21921,17 @@
         </p:nvSpPr>
         <p:spPr>
           <a:xfrm>
-            <a:off x="5242438" y="4645152"/>
-            <a:ext cx="1706819" cy="457200"/>
-          </a:xfrm>
-          <a:prstGeom prst="rect">
-            <a:avLst/>
-          </a:prstGeom>
-          <a:noFill/>
-          <a:ln/>
-        </p:spPr>
-        <p:txBody>
-          <a:bodyPr wrap="square" rtlCol="0" anchor="ctr"/>
+            <a:off x="5242438" y="4464685"/>
+            <a:ext cx="1706819" cy="363220"/>
+          </a:xfrm>
+          <a:prstGeom prst="rect">
+            <a:avLst/>
+          </a:prstGeom>
+          <a:noFill/>
+          <a:ln/>
+        </p:spPr>
+        <p:txBody>
+          <a:bodyPr wrap="square" rtlCol="0" anchor="t"/>
           <a:lstStyle/>
           <a:p>
             <a:pPr algn="ctr" indent="0" marL="0">
@@ -22073,17 +22073,17 @@
         </p:nvSpPr>
         <p:spPr>
           <a:xfrm>
-            <a:off x="7497897" y="3218688"/>
-            <a:ext cx="1706819" cy="274320"/>
-          </a:xfrm>
-          <a:prstGeom prst="rect">
-            <a:avLst/>
-          </a:prstGeom>
-          <a:noFill/>
-          <a:ln/>
-        </p:spPr>
-        <p:txBody>
-          <a:bodyPr wrap="square" rtlCol="0" anchor="ctr"/>
+            <a:off x="7497897" y="3163824"/>
+            <a:ext cx="1706819" cy="189865"/>
+          </a:xfrm>
+          <a:prstGeom prst="rect">
+            <a:avLst/>
+          </a:prstGeom>
+          <a:noFill/>
+          <a:ln/>
+        </p:spPr>
+        <p:txBody>
+          <a:bodyPr wrap="square" rtlCol="0" anchor="t"/>
           <a:lstStyle/>
           <a:p>
             <a:pPr algn="ctr" indent="0" marL="0">
@@ -22112,17 +22112,17 @@
         </p:nvSpPr>
         <p:spPr>
           <a:xfrm>
-            <a:off x="7497897" y="3493008"/>
-            <a:ext cx="1706819" cy="548640"/>
-          </a:xfrm>
-          <a:prstGeom prst="rect">
-            <a:avLst/>
-          </a:prstGeom>
-          <a:noFill/>
-          <a:ln/>
-        </p:spPr>
-        <p:txBody>
-          <a:bodyPr wrap="square" rtlCol="0" anchor="ctr"/>
+            <a:off x="7497897" y="3408553"/>
+            <a:ext cx="1706819" cy="247650"/>
+          </a:xfrm>
+          <a:prstGeom prst="rect">
+            <a:avLst/>
+          </a:prstGeom>
+          <a:noFill/>
+          <a:ln/>
+        </p:spPr>
+        <p:txBody>
+          <a:bodyPr wrap="square" rtlCol="0" anchor="t"/>
           <a:lstStyle/>
           <a:p>
             <a:pPr algn="ctr" indent="0" marL="0">
@@ -22151,22 +22151,22 @@
         </p:nvSpPr>
         <p:spPr>
           <a:xfrm>
-            <a:off x="7497897" y="4114800"/>
-            <a:ext cx="1706819" cy="457200"/>
-          </a:xfrm>
-          <a:prstGeom prst="rect">
-            <a:avLst/>
-          </a:prstGeom>
-          <a:noFill/>
-          <a:ln/>
-        </p:spPr>
-        <p:txBody>
-          <a:bodyPr wrap="square" rtlCol="0" anchor="ctr"/>
+            <a:off x="7497897" y="3738499"/>
+            <a:ext cx="1706819" cy="594360"/>
+          </a:xfrm>
+          <a:prstGeom prst="rect">
+            <a:avLst/>
+          </a:prstGeom>
+          <a:noFill/>
+          <a:ln/>
+        </p:spPr>
+        <p:txBody>
+          <a:bodyPr wrap="square" rtlCol="0" anchor="t"/>
           <a:lstStyle/>
           <a:p>
             <a:pPr algn="ctr" indent="0" marL="0">
               <a:lnSpc>
-                <a:spcPct val="110000"/>
+                <a:spcPct val="105000"/>
               </a:lnSpc>
               <a:buNone/>
             </a:pPr>
@@ -22193,17 +22193,17 @@
         </p:nvSpPr>
         <p:spPr>
           <a:xfrm>
-            <a:off x="7497897" y="4645152"/>
-            <a:ext cx="1706819" cy="457200"/>
-          </a:xfrm>
-          <a:prstGeom prst="rect">
-            <a:avLst/>
-          </a:prstGeom>
-          <a:noFill/>
-          <a:ln/>
-        </p:spPr>
-        <p:txBody>
-          <a:bodyPr wrap="square" rtlCol="0" anchor="ctr"/>
+            <a:off x="7497897" y="4415155"/>
+            <a:ext cx="1706819" cy="363220"/>
+          </a:xfrm>
+          <a:prstGeom prst="rect">
+            <a:avLst/>
+          </a:prstGeom>
+          <a:noFill/>
+          <a:ln/>
+        </p:spPr>
+        <p:txBody>
+          <a:bodyPr wrap="square" rtlCol="0" anchor="t"/>
           <a:lstStyle/>
           <a:p>
             <a:pPr algn="ctr" indent="0" marL="0">
@@ -22345,24 +22345,24 @@
         </p:nvSpPr>
         <p:spPr>
           <a:xfrm>
-            <a:off x="9753356" y="3218688"/>
-            <a:ext cx="1706819" cy="274320"/>
-          </a:xfrm>
-          <a:prstGeom prst="rect">
-            <a:avLst/>
-          </a:prstGeom>
-          <a:noFill/>
-          <a:ln/>
-        </p:spPr>
-        <p:txBody>
-          <a:bodyPr wrap="square" rtlCol="0" anchor="ctr"/>
+            <a:off x="9753356" y="3163824"/>
+            <a:ext cx="1706819" cy="174676"/>
+          </a:xfrm>
+          <a:prstGeom prst="rect">
+            <a:avLst/>
+          </a:prstGeom>
+          <a:noFill/>
+          <a:ln/>
+        </p:spPr>
+        <p:txBody>
+          <a:bodyPr wrap="square" rtlCol="0" anchor="t"/>
           <a:lstStyle/>
           <a:p>
             <a:pPr algn="ctr" indent="0" marL="0">
               <a:buNone/>
             </a:pPr>
             <a:r>
-              <a:rPr lang="en-US" sz="1150" b="1" dirty="0">
+              <a:rPr lang="en-US" sz="1058" b="1" dirty="0">
                 <a:solidFill>
                   <a:srgbClr val="7A4DDB"/>
                 </a:solidFill>
@@ -22372,7 +22372,7 @@
               </a:rPr>
               <a:t>知識工作 / 自動化</a:t>
             </a:r>
-            <a:endParaRPr lang="en-US" sz="1150" dirty="0"/>
+            <a:endParaRPr lang="en-US" sz="1058" dirty="0"/>
           </a:p>
         </p:txBody>
       </p:sp>
@@ -22384,24 +22384,24 @@
         </p:nvSpPr>
         <p:spPr>
           <a:xfrm>
-            <a:off x="9753356" y="3493008"/>
-            <a:ext cx="1706819" cy="548640"/>
-          </a:xfrm>
-          <a:prstGeom prst="rect">
-            <a:avLst/>
-          </a:prstGeom>
-          <a:noFill/>
-          <a:ln/>
-        </p:spPr>
-        <p:txBody>
-          <a:bodyPr wrap="square" rtlCol="0" anchor="ctr"/>
+            <a:off x="9753356" y="3393364"/>
+            <a:ext cx="1706819" cy="455676"/>
+          </a:xfrm>
+          <a:prstGeom prst="rect">
+            <a:avLst/>
+          </a:prstGeom>
+          <a:noFill/>
+          <a:ln/>
+        </p:spPr>
+        <p:txBody>
+          <a:bodyPr wrap="square" rtlCol="0" anchor="t"/>
           <a:lstStyle/>
           <a:p>
             <a:pPr algn="ctr" indent="0" marL="0">
               <a:buNone/>
             </a:pPr>
             <a:r>
-              <a:rPr lang="en-US" sz="1500" b="1" dirty="0">
+              <a:rPr lang="en-US" sz="1380" b="1" dirty="0">
                 <a:solidFill>
                   <a:srgbClr val="1E2235"/>
                 </a:solidFill>
@@ -22411,7 +22411,7 @@
               </a:rPr>
               <a:t>自訂技能與事件觸發</a:t>
             </a:r>
-            <a:endParaRPr lang="en-US" sz="1500" dirty="0"/>
+            <a:endParaRPr lang="en-US" sz="1380" dirty="0"/>
           </a:p>
         </p:txBody>
       </p:sp>
@@ -22423,27 +22423,27 @@
         </p:nvSpPr>
         <p:spPr>
           <a:xfrm>
-            <a:off x="9753356" y="4114800"/>
-            <a:ext cx="1706819" cy="457200"/>
-          </a:xfrm>
-          <a:prstGeom prst="rect">
-            <a:avLst/>
-          </a:prstGeom>
-          <a:noFill/>
-          <a:ln/>
-        </p:spPr>
-        <p:txBody>
-          <a:bodyPr wrap="square" rtlCol="0" anchor="ctr"/>
+            <a:off x="9753356" y="3931336"/>
+            <a:ext cx="1706819" cy="729082"/>
+          </a:xfrm>
+          <a:prstGeom prst="rect">
+            <a:avLst/>
+          </a:prstGeom>
+          <a:noFill/>
+          <a:ln/>
+        </p:spPr>
+        <p:txBody>
+          <a:bodyPr wrap="square" rtlCol="0" anchor="t"/>
           <a:lstStyle/>
           <a:p>
             <a:pPr algn="ctr" indent="0" marL="0">
               <a:lnSpc>
-                <a:spcPct val="110000"/>
+                <a:spcPct val="105000"/>
               </a:lnSpc>
               <a:buNone/>
             </a:pPr>
             <a:r>
-              <a:rPr lang="en-US" sz="1200" dirty="0">
+              <a:rPr lang="en-US" sz="1104" dirty="0">
                 <a:solidFill>
                   <a:srgbClr val="5B6079"/>
                 </a:solidFill>
@@ -22453,7 +22453,7 @@
               </a:rPr>
               <a:t>自訂技能 Skill · 技能評測 Skill Report · 事件觸發任務 Event-driven task</a:t>
             </a:r>
-            <a:endParaRPr lang="en-US" sz="1200" dirty="0"/>
+            <a:endParaRPr lang="en-US" sz="1104" dirty="0"/>
           </a:p>
         </p:txBody>
       </p:sp>
@@ -22465,24 +22465,24 @@
         </p:nvSpPr>
         <p:spPr>
           <a:xfrm>
-            <a:off x="9753356" y="4645152"/>
-            <a:ext cx="1706819" cy="457200"/>
-          </a:xfrm>
-          <a:prstGeom prst="rect">
-            <a:avLst/>
-          </a:prstGeom>
-          <a:noFill/>
-          <a:ln/>
-        </p:spPr>
-        <p:txBody>
-          <a:bodyPr wrap="square" rtlCol="0" anchor="ctr"/>
+            <a:off x="9753356" y="4742713"/>
+            <a:ext cx="1706819" cy="334162"/>
+          </a:xfrm>
+          <a:prstGeom prst="rect">
+            <a:avLst/>
+          </a:prstGeom>
+          <a:noFill/>
+          <a:ln/>
+        </p:spPr>
+        <p:txBody>
+          <a:bodyPr wrap="square" rtlCol="0" anchor="t"/>
           <a:lstStyle/>
           <a:p>
             <a:pPr algn="ctr" indent="0" marL="0">
               <a:buNone/>
             </a:pPr>
             <a:r>
-              <a:rPr lang="en-US" sz="1100" dirty="0">
+              <a:rPr lang="en-US" sz="1012" dirty="0">
                 <a:solidFill>
                   <a:srgbClr val="9AA0C0"/>
                 </a:solidFill>
@@ -22492,14 +22492,14 @@
               </a:rPr>
               <a:t>約 18 分鐘</a:t>
             </a:r>
-            <a:endParaRPr lang="en-US" sz="1100" dirty="0"/>
+            <a:endParaRPr lang="en-US" sz="1012" dirty="0"/>
           </a:p>
           <a:p>
             <a:pPr algn="ctr" indent="0" marL="0">
               <a:buNone/>
             </a:pPr>
             <a:r>
-              <a:rPr lang="en-US" sz="1100" dirty="0">
+              <a:rPr lang="en-US" sz="1012" dirty="0">
                 <a:solidFill>
                   <a:srgbClr val="9AA0C0"/>
                 </a:solidFill>
@@ -22509,7 +22509,7 @@
               </a:rPr>
               <a:t> ★★☆</a:t>
             </a:r>
-            <a:endParaRPr lang="en-US" sz="1100" dirty="0"/>
+            <a:endParaRPr lang="en-US" sz="1012" dirty="0"/>
           </a:p>
         </p:txBody>
       </p:sp>
@@ -23055,7 +23055,7 @@
         <p:spPr>
           <a:xfrm>
             <a:off x="4526280" y="566928"/>
-            <a:ext cx="7132320" cy="822960"/>
+            <a:ext cx="7132320" cy="1097280"/>
           </a:xfrm>
           <a:prstGeom prst="rect">
             <a:avLst/>
@@ -23096,7 +23096,7 @@
         </p:nvSpPr>
         <p:spPr>
           <a:xfrm>
-            <a:off x="4526280" y="1517904"/>
+            <a:off x="4526280" y="1792224"/>
             <a:ext cx="7132320" cy="365760"/>
           </a:xfrm>
           <a:prstGeom prst="rect">
@@ -23135,7 +23135,7 @@
         </p:nvSpPr>
         <p:spPr>
           <a:xfrm>
-            <a:off x="4526280" y="2020824"/>
+            <a:off x="4526280" y="2249424"/>
             <a:ext cx="457200" cy="457200"/>
           </a:xfrm>
           <a:prstGeom prst="ellipse">
@@ -23162,7 +23162,7 @@
         </p:nvSpPr>
         <p:spPr>
           <a:xfrm>
-            <a:off x="4526280" y="2020824"/>
+            <a:off x="4526280" y="2249424"/>
             <a:ext cx="457200" cy="457200"/>
           </a:xfrm>
           <a:prstGeom prst="rect">
@@ -23201,7 +23201,7 @@
         </p:nvSpPr>
         <p:spPr>
           <a:xfrm>
-            <a:off x="5166360" y="2002536"/>
+            <a:off x="5166360" y="2231136"/>
             <a:ext cx="6492240" cy="365760"/>
           </a:xfrm>
           <a:prstGeom prst="rect">
@@ -23240,7 +23240,7 @@
         </p:nvSpPr>
         <p:spPr>
           <a:xfrm>
-            <a:off x="5166360" y="2368296"/>
+            <a:off x="5166360" y="2596896"/>
             <a:ext cx="6492240" cy="502920"/>
           </a:xfrm>
           <a:prstGeom prst="rect">
@@ -23282,7 +23282,7 @@
         </p:nvSpPr>
         <p:spPr>
           <a:xfrm>
-            <a:off x="4526280" y="2990088"/>
+            <a:off x="4526280" y="3218688"/>
             <a:ext cx="457200" cy="457200"/>
           </a:xfrm>
           <a:prstGeom prst="ellipse">
@@ -23309,7 +23309,7 @@
         </p:nvSpPr>
         <p:spPr>
           <a:xfrm>
-            <a:off x="4526280" y="2990088"/>
+            <a:off x="4526280" y="3218688"/>
             <a:ext cx="457200" cy="457200"/>
           </a:xfrm>
           <a:prstGeom prst="rect">
@@ -23348,7 +23348,7 @@
         </p:nvSpPr>
         <p:spPr>
           <a:xfrm>
-            <a:off x="5166360" y="2971800"/>
+            <a:off x="5166360" y="3200400"/>
             <a:ext cx="6492240" cy="365760"/>
           </a:xfrm>
           <a:prstGeom prst="rect">
@@ -23387,7 +23387,7 @@
         </p:nvSpPr>
         <p:spPr>
           <a:xfrm>
-            <a:off x="5166360" y="3337560"/>
+            <a:off x="5166360" y="3566160"/>
             <a:ext cx="6492240" cy="502920"/>
           </a:xfrm>
           <a:prstGeom prst="rect">
@@ -23429,7 +23429,7 @@
         </p:nvSpPr>
         <p:spPr>
           <a:xfrm>
-            <a:off x="4526280" y="3959352"/>
+            <a:off x="4526280" y="4187952"/>
             <a:ext cx="457200" cy="457200"/>
           </a:xfrm>
           <a:prstGeom prst="ellipse">
@@ -23456,7 +23456,7 @@
         </p:nvSpPr>
         <p:spPr>
           <a:xfrm>
-            <a:off x="4526280" y="3959352"/>
+            <a:off x="4526280" y="4187952"/>
             <a:ext cx="457200" cy="457200"/>
           </a:xfrm>
           <a:prstGeom prst="rect">
@@ -23495,7 +23495,7 @@
         </p:nvSpPr>
         <p:spPr>
           <a:xfrm>
-            <a:off x="5166360" y="3941064"/>
+            <a:off x="5166360" y="4169664"/>
             <a:ext cx="6492240" cy="365760"/>
           </a:xfrm>
           <a:prstGeom prst="rect">
@@ -23534,7 +23534,7 @@
         </p:nvSpPr>
         <p:spPr>
           <a:xfrm>
-            <a:off x="5166360" y="4306824"/>
+            <a:off x="5166360" y="4535424"/>
             <a:ext cx="6492240" cy="502920"/>
           </a:xfrm>
           <a:prstGeom prst="rect">
@@ -23576,7 +23576,7 @@
         </p:nvSpPr>
         <p:spPr>
           <a:xfrm>
-            <a:off x="4526280" y="4928616"/>
+            <a:off x="4526280" y="5157216"/>
             <a:ext cx="457200" cy="457200"/>
           </a:xfrm>
           <a:prstGeom prst="ellipse">
@@ -23603,7 +23603,7 @@
         </p:nvSpPr>
         <p:spPr>
           <a:xfrm>
-            <a:off x="4526280" y="4928616"/>
+            <a:off x="4526280" y="5157216"/>
             <a:ext cx="457200" cy="457200"/>
           </a:xfrm>
           <a:prstGeom prst="rect">
@@ -23642,7 +23642,7 @@
         </p:nvSpPr>
         <p:spPr>
           <a:xfrm>
-            <a:off x="5166360" y="4910328"/>
+            <a:off x="5166360" y="5138928"/>
             <a:ext cx="6492240" cy="365760"/>
           </a:xfrm>
           <a:prstGeom prst="rect">
@@ -23681,7 +23681,7 @@
         </p:nvSpPr>
         <p:spPr>
           <a:xfrm>
-            <a:off x="5166360" y="5276088"/>
+            <a:off x="5166360" y="5504688"/>
             <a:ext cx="6492240" cy="502920"/>
           </a:xfrm>
           <a:prstGeom prst="rect">
